--- a/10-Knowledge-Products/KP1-GEA/videos/module_6/en/decks/KP1_M6_6.6_Deck_v0.1.pptx
+++ b/10-Knowledge-Products/KP1-GEA/videos/module_6/en/decks/KP1_M6_6.6_Deck_v0.1.pptx
@@ -1082,6 +1082,12 @@
               <a:t>VO: Wave one is one sector, done well. Pick the sector with a clear flagship the minister cares about — the single learner record, the single patient record. Run the full method there, end to end. But notice what wave one really builds: not just that sector's architecture, but the national foundations — the permanent team, the governance board, and the first shared platforms like identity and data exchange. Wave one looks like one sector. It is actually the foundation the whole rollout stands on.</a:t>
             </a:r>
           </a:p>
+          <a:p/>
+          <a:p>
+            <a:r>
+              <a:t>On screen: the sector block standing on a wider foundation block — reveal the base on 'but notice what wave one really builds'.</a:t>
+            </a:r>
+          </a:p>
         </p:txBody>
       </p:sp>
       <p:sp>
@@ -1150,6 +1156,12 @@
           <a:p>
             <a:r>
               <a:t>VO: From wave two, each new sector reuses what wave one built. The health sector consumes the identity platform and the data-exchange backbone that already exist. Its run of the method is lighter, because the team, the framework and the governance are in place. It delivers faster and costs less. And every sector that joins makes the next one easier still, because the shared platforms get more complete and the team more practised. The rollout accelerates as it goes — the opposite of a programme that gets harder under its own weight.</a:t>
+            </a:r>
+          </a:p>
+          <a:p/>
+          <a:p>
+            <a:r>
+              <a:t>On screen: a wave roadmap — each wave a smaller block than the last, the platform bar beneath growing, the Board bar across the top (the next slide's subject). Reveal the waves left to right.</a:t>
             </a:r>
           </a:p>
         </p:txBody>
@@ -12606,73 +12618,18 @@
       </p:sp>
       <p:sp>
         <p:nvSpPr>
-          <p:cNvPr id="4" name="TextBox 3"/>
-          <p:cNvSpPr txBox="1"/>
-          <p:nvPr/>
-        </p:nvSpPr>
-        <p:spPr>
-          <a:xfrm>
-            <a:off x="658368" y="1600200"/>
-            <a:ext cx="10881360" cy="2651760"/>
-          </a:xfrm>
-          <a:prstGeom prst="rect">
-            <a:avLst/>
-          </a:prstGeom>
-          <a:noFill/>
-        </p:spPr>
-        <p:txBody>
-          <a:bodyPr wrap="square">
-            <a:spAutoFit/>
-          </a:bodyPr>
-          <a:lstStyle/>
-          <a:p>
-            <a:pPr>
-              <a:spcAft>
-                <a:spcPts val="1200"/>
-              </a:spcAft>
-            </a:pPr>
-            <a:r>
-              <a:rPr sz="2000" b="0" i="0">
-                <a:solidFill>
-                  <a:srgbClr val="1A1A1A"/>
-                </a:solidFill>
-                <a:latin typeface="Arial"/>
-              </a:rPr>
-              <a:t>Pick the sector with a clear flagship the minister cares about — the single learner record, the single patient record — and run the full method there, end to end.</a:t>
-            </a:r>
-          </a:p>
-          <a:p>
-            <a:pPr>
-              <a:spcAft>
-                <a:spcPts val="1200"/>
-              </a:spcAft>
-            </a:pPr>
-            <a:r>
-              <a:rPr sz="2000" b="0" i="0">
-                <a:solidFill>
-                  <a:srgbClr val="1A1A1A"/>
-                </a:solidFill>
-                <a:latin typeface="Arial"/>
-              </a:rPr>
-              <a:t>But notice what Wave 1 really builds: not just that sector's architecture, but the national foundations — the permanent team, the governance board, and the first shared platforms like identity and data exchange.</a:t>
-            </a:r>
-          </a:p>
-        </p:txBody>
-      </p:sp>
-      <p:sp>
-        <p:nvSpPr>
-          <p:cNvPr id="5" name="Rounded Rectangle 4"/>
+          <p:cNvPr id="4" name="Rounded Rectangle 3"/>
           <p:cNvSpPr/>
           <p:nvPr/>
         </p:nvSpPr>
         <p:spPr>
           <a:xfrm>
-            <a:off x="658368" y="4434840"/>
-            <a:ext cx="10881360" cy="1325880"/>
+            <a:off x="2651760" y="1737360"/>
+            <a:ext cx="4754880" cy="1463040"/>
           </a:xfrm>
           <a:prstGeom prst="roundRect">
             <a:avLst>
-              <a:gd name="adj" fmla="val 4500"/>
+              <a:gd name="adj" fmla="val 8000"/>
             </a:avLst>
           </a:prstGeom>
           <a:solidFill>
@@ -12698,6 +12655,170 @@
           </a:fontRef>
         </p:style>
         <p:txBody>
+          <a:bodyPr rtlCol="0" anchor="t" lIns="128016" rIns="128016" tIns="91440" bIns="54864" wrap="square"/>
+          <a:lstStyle/>
+          <a:p>
+            <a:pPr algn="l">
+              <a:spcAft>
+                <a:spcPts val="300"/>
+              </a:spcAft>
+            </a:pPr>
+            <a:r>
+              <a:rPr sz="1500" b="1" i="0">
+                <a:solidFill>
+                  <a:srgbClr val="006E96"/>
+                </a:solidFill>
+                <a:latin typeface="Arial"/>
+              </a:rPr>
+              <a:t>WAVE 1 — ONE SECTOR, THE FULL METHOD, END TO END</a:t>
+            </a:r>
+          </a:p>
+          <a:p>
+            <a:pPr algn="l">
+              <a:spcAft>
+                <a:spcPts val="300"/>
+              </a:spcAft>
+            </a:pPr>
+            <a:r>
+              <a:rPr sz="1300" b="0" i="0">
+                <a:solidFill>
+                  <a:srgbClr val="1A1A1A"/>
+                </a:solidFill>
+                <a:latin typeface="Arial"/>
+              </a:rPr>
+              <a:t>A sector with a clear flagship the minister cares about — the single learner record, the single patient record.</a:t>
+            </a:r>
+          </a:p>
+        </p:txBody>
+      </p:sp>
+      <p:sp>
+        <p:nvSpPr>
+          <p:cNvPr id="5" name="Rounded Rectangle 4"/>
+          <p:cNvSpPr/>
+          <p:nvPr/>
+        </p:nvSpPr>
+        <p:spPr>
+          <a:xfrm>
+            <a:off x="658368" y="3383280"/>
+            <a:ext cx="8732520" cy="1600200"/>
+          </a:xfrm>
+          <a:prstGeom prst="roundRect">
+            <a:avLst>
+              <a:gd name="adj" fmla="val 8000"/>
+            </a:avLst>
+          </a:prstGeom>
+          <a:solidFill>
+            <a:srgbClr val="006E96"/>
+          </a:solidFill>
+          <a:ln>
+            <a:noFill/>
+          </a:ln>
+          <a:effectLst/>
+        </p:spPr>
+        <p:style>
+          <a:lnRef idx="1">
+            <a:schemeClr val="accent1"/>
+          </a:lnRef>
+          <a:fillRef idx="3">
+            <a:schemeClr val="accent1"/>
+          </a:fillRef>
+          <a:effectRef idx="2">
+            <a:schemeClr val="accent1"/>
+          </a:effectRef>
+          <a:fontRef idx="minor">
+            <a:schemeClr val="lt1"/>
+          </a:fontRef>
+        </p:style>
+        <p:txBody>
+          <a:bodyPr rtlCol="0" anchor="t" lIns="128016" rIns="128016" tIns="91440" bIns="54864" wrap="square"/>
+          <a:lstStyle/>
+          <a:p>
+            <a:pPr algn="l">
+              <a:spcAft>
+                <a:spcPts val="300"/>
+              </a:spcAft>
+            </a:pPr>
+            <a:r>
+              <a:rPr sz="1500" b="1" i="0">
+                <a:solidFill>
+                  <a:srgbClr val="FFFFFF"/>
+                </a:solidFill>
+                <a:latin typeface="Arial"/>
+              </a:rPr>
+              <a:t>WHAT WAVE 1 REALLY BUILDS — THE NATIONAL FOUNDATIONS</a:t>
+            </a:r>
+          </a:p>
+          <a:p>
+            <a:pPr algn="l">
+              <a:spcAft>
+                <a:spcPts val="300"/>
+              </a:spcAft>
+            </a:pPr>
+            <a:r>
+              <a:rPr sz="1300" b="0" i="0">
+                <a:solidFill>
+                  <a:srgbClr val="FFFFFF"/>
+                </a:solidFill>
+                <a:latin typeface="Arial"/>
+              </a:rPr>
+              <a:t>The permanent team  ·  the governance board  ·  the first shared platforms: identity, data exchange</a:t>
+            </a:r>
+          </a:p>
+          <a:p>
+            <a:pPr algn="l">
+              <a:spcAft>
+                <a:spcPts val="300"/>
+              </a:spcAft>
+            </a:pPr>
+            <a:r>
+              <a:rPr sz="1300" b="0" i="0">
+                <a:solidFill>
+                  <a:srgbClr val="FFFFFF"/>
+                </a:solidFill>
+                <a:latin typeface="Arial"/>
+              </a:rPr>
+              <a:t>Every later sector stands on this — none of them builds it again.</a:t>
+            </a:r>
+          </a:p>
+        </p:txBody>
+      </p:sp>
+      <p:sp>
+        <p:nvSpPr>
+          <p:cNvPr id="6" name="Rectangle 5"/>
+          <p:cNvSpPr/>
+          <p:nvPr/>
+        </p:nvSpPr>
+        <p:spPr>
+          <a:xfrm>
+            <a:off x="9646920" y="1737360"/>
+            <a:ext cx="45720" cy="3246120"/>
+          </a:xfrm>
+          <a:prstGeom prst="rect">
+            <a:avLst/>
+          </a:prstGeom>
+          <a:solidFill>
+            <a:srgbClr val="009CD6"/>
+          </a:solidFill>
+          <a:ln>
+            <a:noFill/>
+          </a:ln>
+          <a:effectLst/>
+        </p:spPr>
+        <p:style>
+          <a:lnRef idx="1">
+            <a:schemeClr val="accent1"/>
+          </a:lnRef>
+          <a:fillRef idx="3">
+            <a:schemeClr val="accent1"/>
+          </a:fillRef>
+          <a:effectRef idx="2">
+            <a:schemeClr val="accent1"/>
+          </a:effectRef>
+          <a:fontRef idx="minor">
+            <a:schemeClr val="lt1"/>
+          </a:fontRef>
+        </p:style>
+        <p:txBody>
           <a:bodyPr rtlCol="0" anchor="ctr"/>
           <a:lstStyle/>
           <a:p>
@@ -12707,14 +12828,14 @@
       </p:sp>
       <p:sp>
         <p:nvSpPr>
-          <p:cNvPr id="6" name="TextBox 5"/>
+          <p:cNvPr id="7" name="TextBox 6"/>
           <p:cNvSpPr txBox="1"/>
           <p:nvPr/>
         </p:nvSpPr>
         <p:spPr>
           <a:xfrm>
-            <a:off x="859536" y="4626864"/>
-            <a:ext cx="10479024" cy="1051560"/>
+            <a:off x="9829800" y="1737360"/>
+            <a:ext cx="1737360" cy="3246120"/>
           </a:xfrm>
           <a:prstGeom prst="rect">
             <a:avLst/>
@@ -12729,11 +12850,61 @@
           <a:p>
             <a:pPr>
               <a:spcAft>
-                <a:spcPts val="700"/>
+                <a:spcPts val="800"/>
               </a:spcAft>
             </a:pPr>
             <a:r>
-              <a:rPr sz="2300" b="1" i="0">
+              <a:rPr sz="1250" b="0" i="1">
+                <a:solidFill>
+                  <a:srgbClr val="595959"/>
+                </a:solidFill>
+                <a:latin typeface="Arial"/>
+              </a:rPr>
+              <a:t>The sector is what the minister sees.</a:t>
+            </a:r>
+          </a:p>
+          <a:p>
+            <a:pPr>
+              <a:spcAft>
+                <a:spcPts val="800"/>
+              </a:spcAft>
+            </a:pPr>
+            <a:r>
+              <a:rPr sz="1250" b="0" i="1">
+                <a:solidFill>
+                  <a:srgbClr val="595959"/>
+                </a:solidFill>
+                <a:latin typeface="Arial"/>
+              </a:rPr>
+              <a:t>The base is what the country keeps.</a:t>
+            </a:r>
+          </a:p>
+        </p:txBody>
+      </p:sp>
+      <p:sp>
+        <p:nvSpPr>
+          <p:cNvPr id="8" name="TextBox 7"/>
+          <p:cNvSpPr txBox="1"/>
+          <p:nvPr/>
+        </p:nvSpPr>
+        <p:spPr>
+          <a:xfrm>
+            <a:off x="658368" y="5760720"/>
+            <a:ext cx="10881360" cy="548640"/>
+          </a:xfrm>
+          <a:prstGeom prst="rect">
+            <a:avLst/>
+          </a:prstGeom>
+          <a:noFill/>
+        </p:spPr>
+        <p:txBody>
+          <a:bodyPr wrap="square">
+            <a:spAutoFit/>
+          </a:bodyPr>
+          <a:lstStyle/>
+          <a:p>
+            <a:r>
+              <a:rPr sz="1550" b="1" i="0">
                 <a:solidFill>
                   <a:srgbClr val="006E96"/>
                 </a:solidFill>
@@ -12746,7 +12917,7 @@
       </p:sp>
       <p:sp>
         <p:nvSpPr>
-          <p:cNvPr id="7" name="TextBox 6"/>
+          <p:cNvPr id="9" name="TextBox 8"/>
           <p:cNvSpPr txBox="1"/>
           <p:nvPr/>
         </p:nvSpPr>
@@ -12876,77 +13047,22 @@
       </p:sp>
       <p:sp>
         <p:nvSpPr>
-          <p:cNvPr id="4" name="TextBox 3"/>
-          <p:cNvSpPr txBox="1"/>
-          <p:nvPr/>
-        </p:nvSpPr>
-        <p:spPr>
-          <a:xfrm>
-            <a:off x="658368" y="1600200"/>
-            <a:ext cx="10881360" cy="2651760"/>
-          </a:xfrm>
-          <a:prstGeom prst="rect">
-            <a:avLst/>
-          </a:prstGeom>
-          <a:noFill/>
-        </p:spPr>
-        <p:txBody>
-          <a:bodyPr wrap="square">
-            <a:spAutoFit/>
-          </a:bodyPr>
-          <a:lstStyle/>
-          <a:p>
-            <a:pPr>
-              <a:spcAft>
-                <a:spcPts val="1200"/>
-              </a:spcAft>
-            </a:pPr>
-            <a:r>
-              <a:rPr sz="2000" b="0" i="0">
-                <a:solidFill>
-                  <a:srgbClr val="1A1A1A"/>
-                </a:solidFill>
-                <a:latin typeface="Arial"/>
-              </a:rPr>
-              <a:t>Each new sector consumes the shared platforms Wave 1 built, runs a lighter method because the team, the framework and the governance are already in place, and delivers faster for less.</a:t>
-            </a:r>
-          </a:p>
-          <a:p>
-            <a:pPr>
-              <a:spcAft>
-                <a:spcPts val="1200"/>
-              </a:spcAft>
-            </a:pPr>
-            <a:r>
-              <a:rPr sz="2000" b="0" i="0">
-                <a:solidFill>
-                  <a:srgbClr val="1A1A1A"/>
-                </a:solidFill>
-                <a:latin typeface="Arial"/>
-              </a:rPr>
-              <a:t>Every sector that joins makes the next one easier still — the platforms get more complete and the team more practised.</a:t>
-            </a:r>
-          </a:p>
-        </p:txBody>
-      </p:sp>
-      <p:sp>
-        <p:nvSpPr>
-          <p:cNvPr id="5" name="Rounded Rectangle 4"/>
+          <p:cNvPr id="4" name="Rounded Rectangle 3"/>
           <p:cNvSpPr/>
           <p:nvPr/>
         </p:nvSpPr>
         <p:spPr>
           <a:xfrm>
-            <a:off x="658368" y="4434840"/>
-            <a:ext cx="10881360" cy="1325880"/>
+            <a:off x="658368" y="1554480"/>
+            <a:ext cx="10881360" cy="457200"/>
           </a:xfrm>
           <a:prstGeom prst="roundRect">
             <a:avLst>
-              <a:gd name="adj" fmla="val 4500"/>
+              <a:gd name="adj" fmla="val 30000"/>
             </a:avLst>
           </a:prstGeom>
           <a:solidFill>
-            <a:srgbClr val="E5F5FB"/>
+            <a:srgbClr val="006E96"/>
           </a:solidFill>
           <a:ln>
             <a:noFill/>
@@ -12968,6 +13084,515 @@
           </a:fontRef>
         </p:style>
         <p:txBody>
+          <a:bodyPr rtlCol="0" anchor="ctr" wrap="square"/>
+          <a:lstStyle/>
+          <a:p>
+            <a:pPr algn="ctr"/>
+            <a:r>
+              <a:rPr sz="1200" b="1" i="0">
+                <a:solidFill>
+                  <a:srgbClr val="FFFFFF"/>
+                </a:solidFill>
+                <a:latin typeface="Arial"/>
+              </a:rPr>
+              <a:t>THE EA BOARD GOVERNS THE PIPELINE — which sector next, what each must reuse, where an exception is warranted</a:t>
+            </a:r>
+          </a:p>
+        </p:txBody>
+      </p:sp>
+      <p:sp>
+        <p:nvSpPr>
+          <p:cNvPr id="5" name="Rounded Rectangle 4"/>
+          <p:cNvSpPr/>
+          <p:nvPr/>
+        </p:nvSpPr>
+        <p:spPr>
+          <a:xfrm>
+            <a:off x="658368" y="2285999"/>
+            <a:ext cx="3574222" cy="2606040"/>
+          </a:xfrm>
+          <a:prstGeom prst="roundRect">
+            <a:avLst>
+              <a:gd name="adj" fmla="val 8000"/>
+            </a:avLst>
+          </a:prstGeom>
+          <a:solidFill>
+            <a:srgbClr val="009CD6"/>
+          </a:solidFill>
+          <a:ln>
+            <a:noFill/>
+          </a:ln>
+          <a:effectLst/>
+        </p:spPr>
+        <p:style>
+          <a:lnRef idx="1">
+            <a:schemeClr val="accent1"/>
+          </a:lnRef>
+          <a:fillRef idx="3">
+            <a:schemeClr val="accent1"/>
+          </a:fillRef>
+          <a:effectRef idx="2">
+            <a:schemeClr val="accent1"/>
+          </a:effectRef>
+          <a:fontRef idx="minor">
+            <a:schemeClr val="lt1"/>
+          </a:fontRef>
+        </p:style>
+        <p:txBody>
+          <a:bodyPr rtlCol="0" anchor="t" lIns="128016" rIns="128016" tIns="91440" bIns="54864" wrap="square"/>
+          <a:lstStyle/>
+          <a:p>
+            <a:pPr algn="l">
+              <a:spcAft>
+                <a:spcPts val="300"/>
+              </a:spcAft>
+            </a:pPr>
+            <a:r>
+              <a:rPr sz="1300" b="1" i="0">
+                <a:solidFill>
+                  <a:srgbClr val="FFFFFF"/>
+                </a:solidFill>
+                <a:latin typeface="Arial"/>
+              </a:rPr>
+              <a:t>WAVE 1 — education</a:t>
+            </a:r>
+          </a:p>
+          <a:p>
+            <a:pPr algn="l">
+              <a:spcAft>
+                <a:spcPts val="300"/>
+              </a:spcAft>
+            </a:pPr>
+            <a:r>
+              <a:rPr sz="1150" b="0" i="0">
+                <a:solidFill>
+                  <a:srgbClr val="FFFFFF"/>
+                </a:solidFill>
+                <a:latin typeface="Arial"/>
+              </a:rPr>
+              <a:t>Full method, end to end</a:t>
+            </a:r>
+          </a:p>
+          <a:p>
+            <a:pPr algn="l">
+              <a:spcAft>
+                <a:spcPts val="300"/>
+              </a:spcAft>
+            </a:pPr>
+            <a:r>
+              <a:rPr sz="1150" b="0" i="0">
+                <a:solidFill>
+                  <a:srgbClr val="FFFFFF"/>
+                </a:solidFill>
+                <a:latin typeface="Arial"/>
+              </a:rPr>
+              <a:t>Builds the team, the board, identity, data exchange</a:t>
+            </a:r>
+          </a:p>
+        </p:txBody>
+      </p:sp>
+      <p:sp>
+        <p:nvSpPr>
+          <p:cNvPr id="6" name="Rounded Rectangle 5"/>
+          <p:cNvSpPr/>
+          <p:nvPr/>
+        </p:nvSpPr>
+        <p:spPr>
+          <a:xfrm>
+            <a:off x="4397182" y="2859328"/>
+            <a:ext cx="2792361" cy="2032711"/>
+          </a:xfrm>
+          <a:prstGeom prst="roundRect">
+            <a:avLst>
+              <a:gd name="adj" fmla="val 8000"/>
+            </a:avLst>
+          </a:prstGeom>
+          <a:solidFill>
+            <a:srgbClr val="E5F5FB"/>
+          </a:solidFill>
+          <a:ln>
+            <a:noFill/>
+          </a:ln>
+          <a:effectLst/>
+        </p:spPr>
+        <p:style>
+          <a:lnRef idx="1">
+            <a:schemeClr val="accent1"/>
+          </a:lnRef>
+          <a:fillRef idx="3">
+            <a:schemeClr val="accent1"/>
+          </a:fillRef>
+          <a:effectRef idx="2">
+            <a:schemeClr val="accent1"/>
+          </a:effectRef>
+          <a:fontRef idx="minor">
+            <a:schemeClr val="lt1"/>
+          </a:fontRef>
+        </p:style>
+        <p:txBody>
+          <a:bodyPr rtlCol="0" anchor="t" lIns="128016" rIns="128016" tIns="91440" bIns="54864" wrap="square"/>
+          <a:lstStyle/>
+          <a:p>
+            <a:pPr algn="l">
+              <a:spcAft>
+                <a:spcPts val="300"/>
+              </a:spcAft>
+            </a:pPr>
+            <a:r>
+              <a:rPr sz="1300" b="1" i="0">
+                <a:solidFill>
+                  <a:srgbClr val="006E96"/>
+                </a:solidFill>
+                <a:latin typeface="Arial"/>
+              </a:rPr>
+              <a:t>WAVE 2 — health</a:t>
+            </a:r>
+          </a:p>
+          <a:p>
+            <a:pPr algn="l">
+              <a:spcAft>
+                <a:spcPts val="300"/>
+              </a:spcAft>
+            </a:pPr>
+            <a:r>
+              <a:rPr sz="1150" b="0" i="0">
+                <a:solidFill>
+                  <a:srgbClr val="1A1A1A"/>
+                </a:solidFill>
+                <a:latin typeface="Arial"/>
+              </a:rPr>
+              <a:t>Consumes the platforms</a:t>
+            </a:r>
+          </a:p>
+          <a:p>
+            <a:pPr algn="l">
+              <a:spcAft>
+                <a:spcPts val="300"/>
+              </a:spcAft>
+            </a:pPr>
+            <a:r>
+              <a:rPr sz="1150" b="0" i="0">
+                <a:solidFill>
+                  <a:srgbClr val="1A1A1A"/>
+                </a:solidFill>
+                <a:latin typeface="Arial"/>
+              </a:rPr>
+              <a:t>Lighter method — team and governance in place</a:t>
+            </a:r>
+          </a:p>
+        </p:txBody>
+      </p:sp>
+      <p:cxnSp>
+        <p:nvCxnSpPr>
+          <p:cNvPr id="7" name="Connector 6"/>
+          <p:cNvCxnSpPr/>
+          <p:nvPr/>
+        </p:nvCxnSpPr>
+        <p:spPr>
+          <a:xfrm>
+            <a:off x="4250878" y="4480559"/>
+            <a:ext cx="128016" cy="0"/>
+          </a:xfrm>
+          <a:prstGeom prst="line">
+            <a:avLst/>
+          </a:prstGeom>
+          <a:ln w="25400">
+            <a:solidFill>
+              <a:srgbClr val="006E96"/>
+            </a:solidFill>
+            <a:tailEnd type="triangle" w="med" len="med"/>
+          </a:ln>
+        </p:spPr>
+        <p:style>
+          <a:lnRef idx="2">
+            <a:schemeClr val="accent1"/>
+          </a:lnRef>
+          <a:fillRef idx="0">
+            <a:schemeClr val="accent1"/>
+          </a:fillRef>
+          <a:effectRef idx="1">
+            <a:schemeClr val="accent1"/>
+          </a:effectRef>
+          <a:fontRef idx="minor">
+            <a:schemeClr val="tx1"/>
+          </a:fontRef>
+        </p:style>
+      </p:cxnSp>
+      <p:sp>
+        <p:nvSpPr>
+          <p:cNvPr id="8" name="Rounded Rectangle 7"/>
+          <p:cNvSpPr/>
+          <p:nvPr/>
+        </p:nvSpPr>
+        <p:spPr>
+          <a:xfrm>
+            <a:off x="7354135" y="3276295"/>
+            <a:ext cx="2233889" cy="1615744"/>
+          </a:xfrm>
+          <a:prstGeom prst="roundRect">
+            <a:avLst>
+              <a:gd name="adj" fmla="val 8000"/>
+            </a:avLst>
+          </a:prstGeom>
+          <a:solidFill>
+            <a:srgbClr val="E5F5FB"/>
+          </a:solidFill>
+          <a:ln>
+            <a:noFill/>
+          </a:ln>
+          <a:effectLst/>
+        </p:spPr>
+        <p:style>
+          <a:lnRef idx="1">
+            <a:schemeClr val="accent1"/>
+          </a:lnRef>
+          <a:fillRef idx="3">
+            <a:schemeClr val="accent1"/>
+          </a:fillRef>
+          <a:effectRef idx="2">
+            <a:schemeClr val="accent1"/>
+          </a:effectRef>
+          <a:fontRef idx="minor">
+            <a:schemeClr val="lt1"/>
+          </a:fontRef>
+        </p:style>
+        <p:txBody>
+          <a:bodyPr rtlCol="0" anchor="t" lIns="128016" rIns="128016" tIns="91440" bIns="54864" wrap="square"/>
+          <a:lstStyle/>
+          <a:p>
+            <a:pPr algn="l">
+              <a:spcAft>
+                <a:spcPts val="300"/>
+              </a:spcAft>
+            </a:pPr>
+            <a:r>
+              <a:rPr sz="1300" b="1" i="0">
+                <a:solidFill>
+                  <a:srgbClr val="006E96"/>
+                </a:solidFill>
+                <a:latin typeface="Arial"/>
+              </a:rPr>
+              <a:t>WAVE 3 — agriculture</a:t>
+            </a:r>
+          </a:p>
+          <a:p>
+            <a:pPr algn="l">
+              <a:spcAft>
+                <a:spcPts val="300"/>
+              </a:spcAft>
+            </a:pPr>
+            <a:r>
+              <a:rPr sz="1150" b="0" i="0">
+                <a:solidFill>
+                  <a:srgbClr val="1A1A1A"/>
+                </a:solidFill>
+                <a:latin typeface="Arial"/>
+              </a:rPr>
+              <a:t>Consumes more</a:t>
+            </a:r>
+          </a:p>
+          <a:p>
+            <a:pPr algn="l">
+              <a:spcAft>
+                <a:spcPts val="300"/>
+              </a:spcAft>
+            </a:pPr>
+            <a:r>
+              <a:rPr sz="1150" b="0" i="0">
+                <a:solidFill>
+                  <a:srgbClr val="1A1A1A"/>
+                </a:solidFill>
+                <a:latin typeface="Arial"/>
+              </a:rPr>
+              <a:t>Faster, for less</a:t>
+            </a:r>
+          </a:p>
+        </p:txBody>
+      </p:sp>
+      <p:cxnSp>
+        <p:nvCxnSpPr>
+          <p:cNvPr id="9" name="Connector 8"/>
+          <p:cNvCxnSpPr/>
+          <p:nvPr/>
+        </p:nvCxnSpPr>
+        <p:spPr>
+          <a:xfrm>
+            <a:off x="7207831" y="4480559"/>
+            <a:ext cx="128016" cy="0"/>
+          </a:xfrm>
+          <a:prstGeom prst="line">
+            <a:avLst/>
+          </a:prstGeom>
+          <a:ln w="25400">
+            <a:solidFill>
+              <a:srgbClr val="006E96"/>
+            </a:solidFill>
+            <a:tailEnd type="triangle" w="med" len="med"/>
+          </a:ln>
+        </p:spPr>
+        <p:style>
+          <a:lnRef idx="2">
+            <a:schemeClr val="accent1"/>
+          </a:lnRef>
+          <a:fillRef idx="0">
+            <a:schemeClr val="accent1"/>
+          </a:fillRef>
+          <a:effectRef idx="1">
+            <a:schemeClr val="accent1"/>
+          </a:effectRef>
+          <a:fontRef idx="minor">
+            <a:schemeClr val="tx1"/>
+          </a:fontRef>
+        </p:style>
+      </p:cxnSp>
+      <p:sp>
+        <p:nvSpPr>
+          <p:cNvPr id="10" name="Rounded Rectangle 9"/>
+          <p:cNvSpPr/>
+          <p:nvPr/>
+        </p:nvSpPr>
+        <p:spPr>
+          <a:xfrm>
+            <a:off x="9752616" y="3589020"/>
+            <a:ext cx="1787111" cy="1303020"/>
+          </a:xfrm>
+          <a:prstGeom prst="roundRect">
+            <a:avLst>
+              <a:gd name="adj" fmla="val 8000"/>
+            </a:avLst>
+          </a:prstGeom>
+          <a:solidFill>
+            <a:srgbClr val="E5F5FB"/>
+          </a:solidFill>
+          <a:ln>
+            <a:noFill/>
+          </a:ln>
+          <a:effectLst/>
+        </p:spPr>
+        <p:style>
+          <a:lnRef idx="1">
+            <a:schemeClr val="accent1"/>
+          </a:lnRef>
+          <a:fillRef idx="3">
+            <a:schemeClr val="accent1"/>
+          </a:fillRef>
+          <a:effectRef idx="2">
+            <a:schemeClr val="accent1"/>
+          </a:effectRef>
+          <a:fontRef idx="minor">
+            <a:schemeClr val="lt1"/>
+          </a:fontRef>
+        </p:style>
+        <p:txBody>
+          <a:bodyPr rtlCol="0" anchor="t" lIns="128016" rIns="128016" tIns="91440" bIns="54864" wrap="square"/>
+          <a:lstStyle/>
+          <a:p>
+            <a:pPr algn="l">
+              <a:spcAft>
+                <a:spcPts val="300"/>
+              </a:spcAft>
+            </a:pPr>
+            <a:r>
+              <a:rPr sz="1300" b="1" i="0">
+                <a:solidFill>
+                  <a:srgbClr val="006E96"/>
+                </a:solidFill>
+                <a:latin typeface="Arial"/>
+              </a:rPr>
+              <a:t>WAVE 4 — social protection</a:t>
+            </a:r>
+          </a:p>
+          <a:p>
+            <a:pPr algn="l">
+              <a:spcAft>
+                <a:spcPts val="300"/>
+              </a:spcAft>
+            </a:pPr>
+            <a:r>
+              <a:rPr sz="1150" b="0" i="0">
+                <a:solidFill>
+                  <a:srgbClr val="1A1A1A"/>
+                </a:solidFill>
+                <a:latin typeface="Arial"/>
+              </a:rPr>
+              <a:t>Easier still</a:t>
+            </a:r>
+          </a:p>
+        </p:txBody>
+      </p:sp>
+      <p:cxnSp>
+        <p:nvCxnSpPr>
+          <p:cNvPr id="11" name="Connector 10"/>
+          <p:cNvCxnSpPr/>
+          <p:nvPr/>
+        </p:nvCxnSpPr>
+        <p:spPr>
+          <a:xfrm>
+            <a:off x="9606312" y="4480559"/>
+            <a:ext cx="128016" cy="0"/>
+          </a:xfrm>
+          <a:prstGeom prst="line">
+            <a:avLst/>
+          </a:prstGeom>
+          <a:ln w="25400">
+            <a:solidFill>
+              <a:srgbClr val="006E96"/>
+            </a:solidFill>
+            <a:tailEnd type="triangle" w="med" len="med"/>
+          </a:ln>
+        </p:spPr>
+        <p:style>
+          <a:lnRef idx="2">
+            <a:schemeClr val="accent1"/>
+          </a:lnRef>
+          <a:fillRef idx="0">
+            <a:schemeClr val="accent1"/>
+          </a:fillRef>
+          <a:effectRef idx="1">
+            <a:schemeClr val="accent1"/>
+          </a:effectRef>
+          <a:fontRef idx="minor">
+            <a:schemeClr val="tx1"/>
+          </a:fontRef>
+        </p:style>
+      </p:cxnSp>
+      <p:sp>
+        <p:nvSpPr>
+          <p:cNvPr id="12" name="Rectangle 11"/>
+          <p:cNvSpPr/>
+          <p:nvPr/>
+        </p:nvSpPr>
+        <p:spPr>
+          <a:xfrm>
+            <a:off x="658368" y="5248656"/>
+            <a:ext cx="3738814" cy="182880"/>
+          </a:xfrm>
+          <a:prstGeom prst="rect">
+            <a:avLst/>
+          </a:prstGeom>
+          <a:solidFill>
+            <a:srgbClr val="006E96"/>
+          </a:solidFill>
+          <a:ln>
+            <a:noFill/>
+          </a:ln>
+          <a:effectLst/>
+        </p:spPr>
+        <p:style>
+          <a:lnRef idx="1">
+            <a:schemeClr val="accent1"/>
+          </a:lnRef>
+          <a:fillRef idx="3">
+            <a:schemeClr val="accent1"/>
+          </a:fillRef>
+          <a:effectRef idx="2">
+            <a:schemeClr val="accent1"/>
+          </a:effectRef>
+          <a:fontRef idx="minor">
+            <a:schemeClr val="lt1"/>
+          </a:fontRef>
+        </p:style>
+        <p:txBody>
           <a:bodyPr rtlCol="0" anchor="ctr"/>
           <a:lstStyle/>
           <a:p>
@@ -12977,14 +13602,146 @@
       </p:sp>
       <p:sp>
         <p:nvSpPr>
-          <p:cNvPr id="6" name="TextBox 5"/>
+          <p:cNvPr id="13" name="Rectangle 12"/>
+          <p:cNvSpPr/>
+          <p:nvPr/>
+        </p:nvSpPr>
+        <p:spPr>
+          <a:xfrm>
+            <a:off x="4397182" y="5175504"/>
+            <a:ext cx="2956953" cy="256032"/>
+          </a:xfrm>
+          <a:prstGeom prst="rect">
+            <a:avLst/>
+          </a:prstGeom>
+          <a:solidFill>
+            <a:srgbClr val="009CD6"/>
+          </a:solidFill>
+          <a:ln>
+            <a:noFill/>
+          </a:ln>
+          <a:effectLst/>
+        </p:spPr>
+        <p:style>
+          <a:lnRef idx="1">
+            <a:schemeClr val="accent1"/>
+          </a:lnRef>
+          <a:fillRef idx="3">
+            <a:schemeClr val="accent1"/>
+          </a:fillRef>
+          <a:effectRef idx="2">
+            <a:schemeClr val="accent1"/>
+          </a:effectRef>
+          <a:fontRef idx="minor">
+            <a:schemeClr val="lt1"/>
+          </a:fontRef>
+        </p:style>
+        <p:txBody>
+          <a:bodyPr rtlCol="0" anchor="ctr"/>
+          <a:lstStyle/>
+          <a:p>
+            <a:pPr algn="ctr"/>
+          </a:p>
+        </p:txBody>
+      </p:sp>
+      <p:sp>
+        <p:nvSpPr>
+          <p:cNvPr id="14" name="Rectangle 13"/>
+          <p:cNvSpPr/>
+          <p:nvPr/>
+        </p:nvSpPr>
+        <p:spPr>
+          <a:xfrm>
+            <a:off x="7354135" y="5102352"/>
+            <a:ext cx="2398481" cy="329184"/>
+          </a:xfrm>
+          <a:prstGeom prst="rect">
+            <a:avLst/>
+          </a:prstGeom>
+          <a:solidFill>
+            <a:srgbClr val="009CD6"/>
+          </a:solidFill>
+          <a:ln>
+            <a:noFill/>
+          </a:ln>
+          <a:effectLst/>
+        </p:spPr>
+        <p:style>
+          <a:lnRef idx="1">
+            <a:schemeClr val="accent1"/>
+          </a:lnRef>
+          <a:fillRef idx="3">
+            <a:schemeClr val="accent1"/>
+          </a:fillRef>
+          <a:effectRef idx="2">
+            <a:schemeClr val="accent1"/>
+          </a:effectRef>
+          <a:fontRef idx="minor">
+            <a:schemeClr val="lt1"/>
+          </a:fontRef>
+        </p:style>
+        <p:txBody>
+          <a:bodyPr rtlCol="0" anchor="ctr"/>
+          <a:lstStyle/>
+          <a:p>
+            <a:pPr algn="ctr"/>
+          </a:p>
+        </p:txBody>
+      </p:sp>
+      <p:sp>
+        <p:nvSpPr>
+          <p:cNvPr id="15" name="Rectangle 14"/>
+          <p:cNvSpPr/>
+          <p:nvPr/>
+        </p:nvSpPr>
+        <p:spPr>
+          <a:xfrm>
+            <a:off x="9752616" y="5029200"/>
+            <a:ext cx="1787111" cy="402336"/>
+          </a:xfrm>
+          <a:prstGeom prst="rect">
+            <a:avLst/>
+          </a:prstGeom>
+          <a:solidFill>
+            <a:srgbClr val="009CD6"/>
+          </a:solidFill>
+          <a:ln>
+            <a:noFill/>
+          </a:ln>
+          <a:effectLst/>
+        </p:spPr>
+        <p:style>
+          <a:lnRef idx="1">
+            <a:schemeClr val="accent1"/>
+          </a:lnRef>
+          <a:fillRef idx="3">
+            <a:schemeClr val="accent1"/>
+          </a:fillRef>
+          <a:effectRef idx="2">
+            <a:schemeClr val="accent1"/>
+          </a:effectRef>
+          <a:fontRef idx="minor">
+            <a:schemeClr val="lt1"/>
+          </a:fontRef>
+        </p:style>
+        <p:txBody>
+          <a:bodyPr rtlCol="0" anchor="ctr"/>
+          <a:lstStyle/>
+          <a:p>
+            <a:pPr algn="ctr"/>
+          </a:p>
+        </p:txBody>
+      </p:sp>
+      <p:sp>
+        <p:nvSpPr>
+          <p:cNvPr id="16" name="TextBox 15"/>
           <p:cNvSpPr txBox="1"/>
           <p:nvPr/>
         </p:nvSpPr>
         <p:spPr>
           <a:xfrm>
-            <a:off x="859536" y="4626864"/>
-            <a:ext cx="10479024" cy="1051560"/>
+            <a:off x="658368" y="5486400"/>
+            <a:ext cx="10881360" cy="320040"/>
           </a:xfrm>
           <a:prstGeom prst="rect">
             <a:avLst/>
@@ -12997,13 +13754,42 @@
           </a:bodyPr>
           <a:lstStyle/>
           <a:p>
-            <a:pPr>
-              <a:spcAft>
-                <a:spcPts val="700"/>
-              </a:spcAft>
-            </a:pPr>
-            <a:r>
-              <a:rPr sz="2300" b="1" i="0">
+            <a:r>
+              <a:rPr sz="1150" b="1" i="0">
+                <a:solidFill>
+                  <a:srgbClr val="006E96"/>
+                </a:solidFill>
+                <a:latin typeface="Arial"/>
+              </a:rPr>
+              <a:t>Shared platforms — more complete with every wave</a:t>
+            </a:r>
+          </a:p>
+        </p:txBody>
+      </p:sp>
+      <p:sp>
+        <p:nvSpPr>
+          <p:cNvPr id="17" name="TextBox 16"/>
+          <p:cNvSpPr txBox="1"/>
+          <p:nvPr/>
+        </p:nvSpPr>
+        <p:spPr>
+          <a:xfrm>
+            <a:off x="658368" y="5806440"/>
+            <a:ext cx="10881360" cy="548640"/>
+          </a:xfrm>
+          <a:prstGeom prst="rect">
+            <a:avLst/>
+          </a:prstGeom>
+          <a:noFill/>
+        </p:spPr>
+        <p:txBody>
+          <a:bodyPr wrap="square">
+            <a:spAutoFit/>
+          </a:bodyPr>
+          <a:lstStyle/>
+          <a:p>
+            <a:r>
+              <a:rPr sz="1550" b="1" i="0">
                 <a:solidFill>
                   <a:srgbClr val="006E96"/>
                 </a:solidFill>
@@ -13016,7 +13802,7 @@
       </p:sp>
       <p:sp>
         <p:nvSpPr>
-          <p:cNvPr id="7" name="TextBox 6"/>
+          <p:cNvPr id="18" name="TextBox 17"/>
           <p:cNvSpPr txBox="1"/>
           <p:nvPr/>
         </p:nvSpPr>
